--- a/.lessons/28 Fundamental Authentication/4 Recreating Logout Feature/1.pptx
+++ b/.lessons/28 Fundamental Authentication/4 Recreating Logout Feature/1.pptx
@@ -8,6 +8,8 @@
     <p:sldId id="402" r:id="rId2"/>
     <p:sldId id="403" r:id="rId3"/>
     <p:sldId id="400" r:id="rId4"/>
+    <p:sldId id="404" r:id="rId5"/>
+    <p:sldId id="405" r:id="rId6"/>
   </p:sldIdLst>
   <p:sldSz cx="12192000" cy="6858000"/>
   <p:notesSz cx="6858000" cy="9144000"/>
@@ -261,7 +263,7 @@
           <a:p>
             <a:fld id="{3E102D2E-813C-461C-9963-687A650C48C0}" type="datetimeFigureOut">
               <a:rPr lang="en-US" smtClean="0"/>
-              <a:t>5/23/2025</a:t>
+              <a:t>6/1/2025</a:t>
             </a:fld>
             <a:endParaRPr lang="en-US"/>
           </a:p>
@@ -459,7 +461,7 @@
           <a:p>
             <a:fld id="{3E102D2E-813C-461C-9963-687A650C48C0}" type="datetimeFigureOut">
               <a:rPr lang="en-US" smtClean="0"/>
-              <a:t>5/23/2025</a:t>
+              <a:t>6/1/2025</a:t>
             </a:fld>
             <a:endParaRPr lang="en-US"/>
           </a:p>
@@ -667,7 +669,7 @@
           <a:p>
             <a:fld id="{3E102D2E-813C-461C-9963-687A650C48C0}" type="datetimeFigureOut">
               <a:rPr lang="en-US" smtClean="0"/>
-              <a:t>5/23/2025</a:t>
+              <a:t>6/1/2025</a:t>
             </a:fld>
             <a:endParaRPr lang="en-US"/>
           </a:p>
@@ -865,7 +867,7 @@
           <a:p>
             <a:fld id="{3E102D2E-813C-461C-9963-687A650C48C0}" type="datetimeFigureOut">
               <a:rPr lang="en-US" smtClean="0"/>
-              <a:t>5/23/2025</a:t>
+              <a:t>6/1/2025</a:t>
             </a:fld>
             <a:endParaRPr lang="en-US"/>
           </a:p>
@@ -1140,7 +1142,7 @@
           <a:p>
             <a:fld id="{3E102D2E-813C-461C-9963-687A650C48C0}" type="datetimeFigureOut">
               <a:rPr lang="en-US" smtClean="0"/>
-              <a:t>5/23/2025</a:t>
+              <a:t>6/1/2025</a:t>
             </a:fld>
             <a:endParaRPr lang="en-US"/>
           </a:p>
@@ -1405,7 +1407,7 @@
           <a:p>
             <a:fld id="{3E102D2E-813C-461C-9963-687A650C48C0}" type="datetimeFigureOut">
               <a:rPr lang="en-US" smtClean="0"/>
-              <a:t>5/23/2025</a:t>
+              <a:t>6/1/2025</a:t>
             </a:fld>
             <a:endParaRPr lang="en-US"/>
           </a:p>
@@ -1817,7 +1819,7 @@
           <a:p>
             <a:fld id="{3E102D2E-813C-461C-9963-687A650C48C0}" type="datetimeFigureOut">
               <a:rPr lang="en-US" smtClean="0"/>
-              <a:t>5/23/2025</a:t>
+              <a:t>6/1/2025</a:t>
             </a:fld>
             <a:endParaRPr lang="en-US"/>
           </a:p>
@@ -1958,7 +1960,7 @@
           <a:p>
             <a:fld id="{3E102D2E-813C-461C-9963-687A650C48C0}" type="datetimeFigureOut">
               <a:rPr lang="en-US" smtClean="0"/>
-              <a:t>5/23/2025</a:t>
+              <a:t>6/1/2025</a:t>
             </a:fld>
             <a:endParaRPr lang="en-US"/>
           </a:p>
@@ -2071,7 +2073,7 @@
           <a:p>
             <a:fld id="{3E102D2E-813C-461C-9963-687A650C48C0}" type="datetimeFigureOut">
               <a:rPr lang="en-US" smtClean="0"/>
-              <a:t>5/23/2025</a:t>
+              <a:t>6/1/2025</a:t>
             </a:fld>
             <a:endParaRPr lang="en-US"/>
           </a:p>
@@ -2382,7 +2384,7 @@
           <a:p>
             <a:fld id="{3E102D2E-813C-461C-9963-687A650C48C0}" type="datetimeFigureOut">
               <a:rPr lang="en-US" smtClean="0"/>
-              <a:t>5/23/2025</a:t>
+              <a:t>6/1/2025</a:t>
             </a:fld>
             <a:endParaRPr lang="en-US"/>
           </a:p>
@@ -2670,7 +2672,7 @@
           <a:p>
             <a:fld id="{3E102D2E-813C-461C-9963-687A650C48C0}" type="datetimeFigureOut">
               <a:rPr lang="en-US" smtClean="0"/>
-              <a:t>5/23/2025</a:t>
+              <a:t>6/1/2025</a:t>
             </a:fld>
             <a:endParaRPr lang="en-US"/>
           </a:p>
@@ -2911,7 +2913,7 @@
           <a:p>
             <a:fld id="{3E102D2E-813C-461C-9963-687A650C48C0}" type="datetimeFigureOut">
               <a:rPr lang="en-US" smtClean="0"/>
-              <a:t>5/23/2025</a:t>
+              <a:t>6/1/2025</a:t>
             </a:fld>
             <a:endParaRPr lang="en-US"/>
           </a:p>
@@ -3348,8 +3350,8 @@
         </p:nvSpPr>
         <p:spPr>
           <a:xfrm>
-            <a:off x="217714" y="255046"/>
-            <a:ext cx="11756571" cy="355354"/>
+            <a:off x="217714" y="134973"/>
+            <a:ext cx="11756571" cy="822726"/>
           </a:xfrm>
           <a:prstGeom prst="rect">
             <a:avLst/>
@@ -3369,21 +3371,133 @@
               <a:buNone/>
             </a:pPr>
             <a:r>
-              <a:rPr kumimoji="0" lang="en-US" altLang="en-US" sz="1300" b="0" i="0" u="none" strike="noStrike" cap="none" normalizeH="0" baseline="0">
-                <a:ln>
-                  <a:noFill/>
-                </a:ln>
-                <a:solidFill>
-                  <a:schemeClr val="tx1"/>
-                </a:solidFill>
-                <a:effectLst/>
+              <a:rPr lang="az-Latn-AZ" altLang="en-US" sz="1100">
                 <a:latin typeface="Arial" panose="020B0604020202020204" pitchFamily="34" charset="0"/>
               </a:rPr>
-              <a:t>.</a:t>
-            </a:r>
-          </a:p>
-        </p:txBody>
-      </p:sp>
+              <a:t>Sistemdən çıxmaq üçün </a:t>
+            </a:r>
+            <a:r>
+              <a:rPr lang="az-Latn-AZ" altLang="en-US" sz="1100" b="1">
+                <a:latin typeface="Arial" panose="020B0604020202020204" pitchFamily="34" charset="0"/>
+              </a:rPr>
+              <a:t>LOGOUT</a:t>
+            </a:r>
+            <a:r>
+              <a:rPr lang="az-Latn-AZ" altLang="en-US" sz="1100">
+                <a:latin typeface="Arial" panose="020B0604020202020204" pitchFamily="34" charset="0"/>
+              </a:rPr>
+              <a:t> düyməsini əlavə edirik </a:t>
+            </a:r>
+            <a:r>
+              <a:rPr lang="az-Latn-AZ" altLang="en-US" sz="1100" b="1">
+                <a:latin typeface="Arial" panose="020B0604020202020204" pitchFamily="34" charset="0"/>
+              </a:rPr>
+              <a:t>ŞABLONA</a:t>
+            </a:r>
+            <a:r>
+              <a:rPr lang="az-Latn-AZ" altLang="en-US" sz="1100">
+                <a:latin typeface="Arial" panose="020B0604020202020204" pitchFamily="34" charset="0"/>
+              </a:rPr>
+              <a:t>. </a:t>
+            </a:r>
+          </a:p>
+          <a:p>
+            <a:pPr>
+              <a:lnSpc>
+                <a:spcPct val="150000"/>
+              </a:lnSpc>
+              <a:buNone/>
+            </a:pPr>
+            <a:endParaRPr lang="az-Latn-AZ" altLang="en-US" sz="1100">
+              <a:latin typeface="Arial" panose="020B0604020202020204" pitchFamily="34" charset="0"/>
+            </a:endParaRPr>
+          </a:p>
+          <a:p>
+            <a:pPr>
+              <a:lnSpc>
+                <a:spcPct val="150000"/>
+              </a:lnSpc>
+              <a:buNone/>
+            </a:pPr>
+            <a:r>
+              <a:rPr lang="az-Latn-AZ" altLang="en-US" sz="1100" b="1">
+                <a:latin typeface="Arial" panose="020B0604020202020204" pitchFamily="34" charset="0"/>
+              </a:rPr>
+              <a:t>LOGOUT</a:t>
+            </a:r>
+            <a:r>
+              <a:rPr lang="az-Latn-AZ" altLang="en-US" sz="1100">
+                <a:latin typeface="Arial" panose="020B0604020202020204" pitchFamily="34" charset="0"/>
+              </a:rPr>
+              <a:t> </a:t>
+            </a:r>
+            <a:r>
+              <a:rPr lang="az-Latn-AZ" altLang="en-US" sz="1100" b="1">
+                <a:latin typeface="Arial" panose="020B0604020202020204" pitchFamily="34" charset="0"/>
+              </a:rPr>
+              <a:t>url</a:t>
+            </a:r>
+            <a:r>
+              <a:rPr lang="az-Latn-AZ" altLang="en-US" sz="1100">
+                <a:latin typeface="Arial" panose="020B0604020202020204" pitchFamily="34" charset="0"/>
+              </a:rPr>
+              <a:t>-si </a:t>
+            </a:r>
+            <a:r>
+              <a:rPr lang="az-Latn-AZ" altLang="en-US" sz="1100" b="1">
+                <a:latin typeface="Arial" panose="020B0604020202020204" pitchFamily="34" charset="0"/>
+              </a:rPr>
+              <a:t>POST</a:t>
+            </a:r>
+            <a:r>
+              <a:rPr lang="az-Latn-AZ" altLang="en-US" sz="1100">
+                <a:latin typeface="Arial" panose="020B0604020202020204" pitchFamily="34" charset="0"/>
+              </a:rPr>
+              <a:t> sorğusu ilə göndərilir. </a:t>
+            </a:r>
+            <a:endParaRPr kumimoji="0" lang="en-US" altLang="en-US" sz="1100" b="0" i="0" u="none" strike="noStrike" cap="none" normalizeH="0" baseline="0">
+              <a:ln>
+                <a:noFill/>
+              </a:ln>
+              <a:solidFill>
+                <a:schemeClr val="tx1"/>
+              </a:solidFill>
+              <a:effectLst/>
+              <a:latin typeface="Arial" panose="020B0604020202020204" pitchFamily="34" charset="0"/>
+            </a:endParaRPr>
+          </a:p>
+        </p:txBody>
+      </p:sp>
+      <p:pic>
+        <p:nvPicPr>
+          <p:cNvPr id="4" name="Picture 3">
+            <a:extLst>
+              <a:ext uri="{FF2B5EF4-FFF2-40B4-BE49-F238E27FC236}">
+                <a16:creationId xmlns:a16="http://schemas.microsoft.com/office/drawing/2014/main" id="{9F6A8E68-0598-3C7F-7ED7-4E8A8975D7CE}"/>
+              </a:ext>
+            </a:extLst>
+          </p:cNvPr>
+          <p:cNvPicPr>
+            <a:picLocks noChangeAspect="1"/>
+          </p:cNvPicPr>
+          <p:nvPr/>
+        </p:nvPicPr>
+        <p:blipFill>
+          <a:blip r:embed="rId2"/>
+          <a:stretch>
+            <a:fillRect/>
+          </a:stretch>
+        </p:blipFill>
+        <p:spPr>
+          <a:xfrm>
+            <a:off x="0" y="1071194"/>
+            <a:ext cx="12192000" cy="5786806"/>
+          </a:xfrm>
+          <a:prstGeom prst="rect">
+            <a:avLst/>
+          </a:prstGeom>
+        </p:spPr>
+      </p:pic>
     </p:spTree>
     <p:extLst>
       <p:ext uri="{BB962C8B-B14F-4D97-AF65-F5344CB8AC3E}">
@@ -3455,21 +3569,54 @@
               <a:buNone/>
             </a:pPr>
             <a:r>
-              <a:rPr kumimoji="0" lang="en-US" altLang="en-US" sz="1300" b="0" i="0" u="none" strike="noStrike" cap="none" normalizeH="0" baseline="0">
-                <a:ln>
-                  <a:noFill/>
-                </a:ln>
-                <a:solidFill>
-                  <a:schemeClr val="tx1"/>
-                </a:solidFill>
-                <a:effectLst/>
+              <a:rPr lang="az-Latn-AZ" altLang="en-US" sz="1300">
                 <a:latin typeface="Arial" panose="020B0604020202020204" pitchFamily="34" charset="0"/>
               </a:rPr>
-              <a:t>.</a:t>
-            </a:r>
-          </a:p>
-        </p:txBody>
-      </p:sp>
+              <a:t>LOGOUT olduqdan sonra proqram bizi ƏSAS səhifəyə yönləndirir.</a:t>
+            </a:r>
+            <a:endParaRPr kumimoji="0" lang="en-US" altLang="en-US" sz="1300" b="0" i="0" u="none" strike="noStrike" cap="none" normalizeH="0" baseline="0">
+              <a:ln>
+                <a:noFill/>
+              </a:ln>
+              <a:solidFill>
+                <a:schemeClr val="tx1"/>
+              </a:solidFill>
+              <a:effectLst/>
+              <a:latin typeface="Arial" panose="020B0604020202020204" pitchFamily="34" charset="0"/>
+            </a:endParaRPr>
+          </a:p>
+        </p:txBody>
+      </p:sp>
+      <p:pic>
+        <p:nvPicPr>
+          <p:cNvPr id="4" name="Picture 3">
+            <a:extLst>
+              <a:ext uri="{FF2B5EF4-FFF2-40B4-BE49-F238E27FC236}">
+                <a16:creationId xmlns:a16="http://schemas.microsoft.com/office/drawing/2014/main" id="{8AFF1955-C720-0FFC-C77C-357D37837F8F}"/>
+              </a:ext>
+            </a:extLst>
+          </p:cNvPr>
+          <p:cNvPicPr>
+            <a:picLocks noChangeAspect="1"/>
+          </p:cNvPicPr>
+          <p:nvPr/>
+        </p:nvPicPr>
+        <p:blipFill>
+          <a:blip r:embed="rId2"/>
+          <a:stretch>
+            <a:fillRect/>
+          </a:stretch>
+        </p:blipFill>
+        <p:spPr>
+          <a:xfrm>
+            <a:off x="0" y="1028741"/>
+            <a:ext cx="12192000" cy="5829259"/>
+          </a:xfrm>
+          <a:prstGeom prst="rect">
+            <a:avLst/>
+          </a:prstGeom>
+        </p:spPr>
+      </p:pic>
     </p:spTree>
     <p:extLst>
       <p:ext uri="{BB962C8B-B14F-4D97-AF65-F5344CB8AC3E}">
@@ -3560,6 +3707,178 @@
     <p:extLst>
       <p:ext uri="{BB962C8B-B14F-4D97-AF65-F5344CB8AC3E}">
         <p14:creationId xmlns:p14="http://schemas.microsoft.com/office/powerpoint/2010/main" val="3095838342"/>
+      </p:ext>
+    </p:extLst>
+  </p:cSld>
+  <p:clrMapOvr>
+    <a:masterClrMapping/>
+  </p:clrMapOvr>
+</p:sld>
+</file>
+
+<file path=ppt/slides/slide4.xml><?xml version="1.0" encoding="utf-8"?>
+<p:sld xmlns:a="http://schemas.openxmlformats.org/drawingml/2006/main" xmlns:r="http://schemas.openxmlformats.org/officeDocument/2006/relationships" xmlns:p="http://schemas.openxmlformats.org/presentationml/2006/main">
+  <p:cSld>
+    <p:spTree>
+      <p:nvGrpSpPr>
+        <p:cNvPr id="1" name="">
+          <a:extLst>
+            <a:ext uri="{FF2B5EF4-FFF2-40B4-BE49-F238E27FC236}">
+              <a16:creationId xmlns:a16="http://schemas.microsoft.com/office/drawing/2014/main" id="{143F1C50-6A08-E8A3-761F-EEDBCF8991D7}"/>
+            </a:ext>
+          </a:extLst>
+        </p:cNvPr>
+        <p:cNvGrpSpPr/>
+        <p:nvPr/>
+      </p:nvGrpSpPr>
+      <p:grpSpPr>
+        <a:xfrm>
+          <a:off x="0" y="0"/>
+          <a:ext cx="0" cy="0"/>
+          <a:chOff x="0" y="0"/>
+          <a:chExt cx="0" cy="0"/>
+        </a:xfrm>
+      </p:grpSpPr>
+      <p:sp>
+        <p:nvSpPr>
+          <p:cNvPr id="3" name="TextBox 2">
+            <a:extLst>
+              <a:ext uri="{FF2B5EF4-FFF2-40B4-BE49-F238E27FC236}">
+                <a16:creationId xmlns:a16="http://schemas.microsoft.com/office/drawing/2014/main" id="{85F99C5C-0074-E161-4643-15F570CC2992}"/>
+              </a:ext>
+            </a:extLst>
+          </p:cNvPr>
+          <p:cNvSpPr txBox="1"/>
+          <p:nvPr/>
+        </p:nvSpPr>
+        <p:spPr>
+          <a:xfrm>
+            <a:off x="217714" y="255046"/>
+            <a:ext cx="11756571" cy="355354"/>
+          </a:xfrm>
+          <a:prstGeom prst="rect">
+            <a:avLst/>
+          </a:prstGeom>
+          <a:noFill/>
+        </p:spPr>
+        <p:txBody>
+          <a:bodyPr wrap="square">
+            <a:spAutoFit/>
+          </a:bodyPr>
+          <a:lstStyle/>
+          <a:p>
+            <a:pPr>
+              <a:lnSpc>
+                <a:spcPct val="150000"/>
+              </a:lnSpc>
+              <a:buNone/>
+            </a:pPr>
+            <a:r>
+              <a:rPr kumimoji="0" lang="en-US" altLang="en-US" sz="1300" b="0" i="0" u="none" strike="noStrike" cap="none" normalizeH="0" baseline="0">
+                <a:ln>
+                  <a:noFill/>
+                </a:ln>
+                <a:solidFill>
+                  <a:schemeClr val="tx1"/>
+                </a:solidFill>
+                <a:effectLst/>
+                <a:latin typeface="Arial" panose="020B0604020202020204" pitchFamily="34" charset="0"/>
+              </a:rPr>
+              <a:t>.</a:t>
+            </a:r>
+          </a:p>
+        </p:txBody>
+      </p:sp>
+    </p:spTree>
+    <p:extLst>
+      <p:ext uri="{BB962C8B-B14F-4D97-AF65-F5344CB8AC3E}">
+        <p14:creationId xmlns:p14="http://schemas.microsoft.com/office/powerpoint/2010/main" val="2237911747"/>
+      </p:ext>
+    </p:extLst>
+  </p:cSld>
+  <p:clrMapOvr>
+    <a:masterClrMapping/>
+  </p:clrMapOvr>
+</p:sld>
+</file>
+
+<file path=ppt/slides/slide5.xml><?xml version="1.0" encoding="utf-8"?>
+<p:sld xmlns:a="http://schemas.openxmlformats.org/drawingml/2006/main" xmlns:r="http://schemas.openxmlformats.org/officeDocument/2006/relationships" xmlns:p="http://schemas.openxmlformats.org/presentationml/2006/main">
+  <p:cSld>
+    <p:spTree>
+      <p:nvGrpSpPr>
+        <p:cNvPr id="1" name="">
+          <a:extLst>
+            <a:ext uri="{FF2B5EF4-FFF2-40B4-BE49-F238E27FC236}">
+              <a16:creationId xmlns:a16="http://schemas.microsoft.com/office/drawing/2014/main" id="{4ABA4867-F622-31D5-BF5A-356B9474B682}"/>
+            </a:ext>
+          </a:extLst>
+        </p:cNvPr>
+        <p:cNvGrpSpPr/>
+        <p:nvPr/>
+      </p:nvGrpSpPr>
+      <p:grpSpPr>
+        <a:xfrm>
+          <a:off x="0" y="0"/>
+          <a:ext cx="0" cy="0"/>
+          <a:chOff x="0" y="0"/>
+          <a:chExt cx="0" cy="0"/>
+        </a:xfrm>
+      </p:grpSpPr>
+      <p:sp>
+        <p:nvSpPr>
+          <p:cNvPr id="3" name="TextBox 2">
+            <a:extLst>
+              <a:ext uri="{FF2B5EF4-FFF2-40B4-BE49-F238E27FC236}">
+                <a16:creationId xmlns:a16="http://schemas.microsoft.com/office/drawing/2014/main" id="{54486D65-9451-04A1-DA2C-EF87587697FD}"/>
+              </a:ext>
+            </a:extLst>
+          </p:cNvPr>
+          <p:cNvSpPr txBox="1"/>
+          <p:nvPr/>
+        </p:nvSpPr>
+        <p:spPr>
+          <a:xfrm>
+            <a:off x="217714" y="255046"/>
+            <a:ext cx="11756571" cy="355354"/>
+          </a:xfrm>
+          <a:prstGeom prst="rect">
+            <a:avLst/>
+          </a:prstGeom>
+          <a:noFill/>
+        </p:spPr>
+        <p:txBody>
+          <a:bodyPr wrap="square">
+            <a:spAutoFit/>
+          </a:bodyPr>
+          <a:lstStyle/>
+          <a:p>
+            <a:pPr>
+              <a:lnSpc>
+                <a:spcPct val="150000"/>
+              </a:lnSpc>
+              <a:buNone/>
+            </a:pPr>
+            <a:r>
+              <a:rPr kumimoji="0" lang="en-US" altLang="en-US" sz="1300" b="0" i="0" u="none" strike="noStrike" cap="none" normalizeH="0" baseline="0">
+                <a:ln>
+                  <a:noFill/>
+                </a:ln>
+                <a:solidFill>
+                  <a:schemeClr val="tx1"/>
+                </a:solidFill>
+                <a:effectLst/>
+                <a:latin typeface="Arial" panose="020B0604020202020204" pitchFamily="34" charset="0"/>
+              </a:rPr>
+              <a:t>.</a:t>
+            </a:r>
+          </a:p>
+        </p:txBody>
+      </p:sp>
+    </p:spTree>
+    <p:extLst>
+      <p:ext uri="{BB962C8B-B14F-4D97-AF65-F5344CB8AC3E}">
+        <p14:creationId xmlns:p14="http://schemas.microsoft.com/office/powerpoint/2010/main" val="3545104841"/>
       </p:ext>
     </p:extLst>
   </p:cSld>
